--- a/宣道詩/(宣道詩264)基督化家庭.pptx
+++ b/宣道詩/(宣道詩264)基督化家庭.pptx
@@ -177,10 +177,9 @@
           <a:lstStyle/>
           <a:p>
             <a:r>
-              <a:rPr lang="zh-TW" altLang="en-US" smtClean="0"/>
+              <a:rPr lang="zh-TW" altLang="en-US"/>
               <a:t>按一下以編輯母片標題樣式</a:t>
             </a:r>
-            <a:endParaRPr lang="zh-TW" altLang="en-US"/>
           </a:p>
         </p:txBody>
       </p:sp>
@@ -296,10 +295,9 @@
           </a:lstStyle>
           <a:p>
             <a:r>
-              <a:rPr lang="zh-TW" altLang="en-US" smtClean="0"/>
+              <a:rPr lang="zh-TW" altLang="en-US"/>
               <a:t>按一下以編輯母片副標題樣式</a:t>
             </a:r>
-            <a:endParaRPr lang="zh-TW" altLang="en-US"/>
           </a:p>
         </p:txBody>
       </p:sp>
@@ -320,7 +318,7 @@
           <a:p>
             <a:fld id="{36FCB419-7C73-4AB4-9860-2D9772FC8235}" type="datetimeFigureOut">
               <a:rPr lang="zh-TW" altLang="en-US" smtClean="0"/>
-              <a:t>2021/5/8</a:t>
+              <a:t>2025/9/12</a:t>
             </a:fld>
             <a:endParaRPr lang="zh-TW" altLang="en-US"/>
           </a:p>
@@ -409,10 +407,9 @@
           <a:lstStyle/>
           <a:p>
             <a:r>
-              <a:rPr lang="zh-TW" altLang="en-US" smtClean="0"/>
+              <a:rPr lang="zh-TW" altLang="en-US"/>
               <a:t>按一下以編輯母片標題樣式</a:t>
             </a:r>
-            <a:endParaRPr lang="zh-TW" altLang="en-US"/>
           </a:p>
         </p:txBody>
       </p:sp>
@@ -433,38 +430,37 @@
           <a:p>
             <a:pPr lvl="0"/>
             <a:r>
-              <a:rPr lang="zh-TW" altLang="en-US" smtClean="0"/>
+              <a:rPr lang="zh-TW" altLang="en-US"/>
               <a:t>按一下以編輯母片文字樣式</a:t>
             </a:r>
           </a:p>
           <a:p>
             <a:pPr lvl="1"/>
             <a:r>
-              <a:rPr lang="zh-TW" altLang="en-US" smtClean="0"/>
+              <a:rPr lang="zh-TW" altLang="en-US"/>
               <a:t>第二層</a:t>
             </a:r>
           </a:p>
           <a:p>
             <a:pPr lvl="2"/>
             <a:r>
-              <a:rPr lang="zh-TW" altLang="en-US" smtClean="0"/>
+              <a:rPr lang="zh-TW" altLang="en-US"/>
               <a:t>第三層</a:t>
             </a:r>
           </a:p>
           <a:p>
             <a:pPr lvl="3"/>
             <a:r>
-              <a:rPr lang="zh-TW" altLang="en-US" smtClean="0"/>
+              <a:rPr lang="zh-TW" altLang="en-US"/>
               <a:t>第四層</a:t>
             </a:r>
           </a:p>
           <a:p>
             <a:pPr lvl="4"/>
             <a:r>
-              <a:rPr lang="zh-TW" altLang="en-US" smtClean="0"/>
+              <a:rPr lang="zh-TW" altLang="en-US"/>
               <a:t>第五層</a:t>
             </a:r>
-            <a:endParaRPr lang="zh-TW" altLang="en-US"/>
           </a:p>
         </p:txBody>
       </p:sp>
@@ -485,7 +481,7 @@
           <a:p>
             <a:fld id="{36FCB419-7C73-4AB4-9860-2D9772FC8235}" type="datetimeFigureOut">
               <a:rPr lang="zh-TW" altLang="en-US" smtClean="0"/>
-              <a:t>2021/5/8</a:t>
+              <a:t>2025/9/12</a:t>
             </a:fld>
             <a:endParaRPr lang="zh-TW" altLang="en-US"/>
           </a:p>
@@ -579,10 +575,9 @@
           <a:lstStyle/>
           <a:p>
             <a:r>
-              <a:rPr lang="zh-TW" altLang="en-US" smtClean="0"/>
+              <a:rPr lang="zh-TW" altLang="en-US"/>
               <a:t>按一下以編輯母片標題樣式</a:t>
             </a:r>
-            <a:endParaRPr lang="zh-TW" altLang="en-US"/>
           </a:p>
         </p:txBody>
       </p:sp>
@@ -608,38 +603,37 @@
           <a:p>
             <a:pPr lvl="0"/>
             <a:r>
-              <a:rPr lang="zh-TW" altLang="en-US" smtClean="0"/>
+              <a:rPr lang="zh-TW" altLang="en-US"/>
               <a:t>按一下以編輯母片文字樣式</a:t>
             </a:r>
           </a:p>
           <a:p>
             <a:pPr lvl="1"/>
             <a:r>
-              <a:rPr lang="zh-TW" altLang="en-US" smtClean="0"/>
+              <a:rPr lang="zh-TW" altLang="en-US"/>
               <a:t>第二層</a:t>
             </a:r>
           </a:p>
           <a:p>
             <a:pPr lvl="2"/>
             <a:r>
-              <a:rPr lang="zh-TW" altLang="en-US" smtClean="0"/>
+              <a:rPr lang="zh-TW" altLang="en-US"/>
               <a:t>第三層</a:t>
             </a:r>
           </a:p>
           <a:p>
             <a:pPr lvl="3"/>
             <a:r>
-              <a:rPr lang="zh-TW" altLang="en-US" smtClean="0"/>
+              <a:rPr lang="zh-TW" altLang="en-US"/>
               <a:t>第四層</a:t>
             </a:r>
           </a:p>
           <a:p>
             <a:pPr lvl="4"/>
             <a:r>
-              <a:rPr lang="zh-TW" altLang="en-US" smtClean="0"/>
+              <a:rPr lang="zh-TW" altLang="en-US"/>
               <a:t>第五層</a:t>
             </a:r>
-            <a:endParaRPr lang="zh-TW" altLang="en-US"/>
           </a:p>
         </p:txBody>
       </p:sp>
@@ -660,7 +654,7 @@
           <a:p>
             <a:fld id="{36FCB419-7C73-4AB4-9860-2D9772FC8235}" type="datetimeFigureOut">
               <a:rPr lang="zh-TW" altLang="en-US" smtClean="0"/>
-              <a:t>2021/5/8</a:t>
+              <a:t>2025/9/12</a:t>
             </a:fld>
             <a:endParaRPr lang="zh-TW" altLang="en-US"/>
           </a:p>
@@ -749,10 +743,9 @@
           <a:lstStyle/>
           <a:p>
             <a:r>
-              <a:rPr lang="zh-TW" altLang="en-US" smtClean="0"/>
+              <a:rPr lang="zh-TW" altLang="en-US"/>
               <a:t>按一下以編輯母片標題樣式</a:t>
             </a:r>
-            <a:endParaRPr lang="zh-TW" altLang="en-US"/>
           </a:p>
         </p:txBody>
       </p:sp>
@@ -773,38 +766,37 @@
           <a:p>
             <a:pPr lvl="0"/>
             <a:r>
-              <a:rPr lang="zh-TW" altLang="en-US" smtClean="0"/>
+              <a:rPr lang="zh-TW" altLang="en-US"/>
               <a:t>按一下以編輯母片文字樣式</a:t>
             </a:r>
           </a:p>
           <a:p>
             <a:pPr lvl="1"/>
             <a:r>
-              <a:rPr lang="zh-TW" altLang="en-US" smtClean="0"/>
+              <a:rPr lang="zh-TW" altLang="en-US"/>
               <a:t>第二層</a:t>
             </a:r>
           </a:p>
           <a:p>
             <a:pPr lvl="2"/>
             <a:r>
-              <a:rPr lang="zh-TW" altLang="en-US" smtClean="0"/>
+              <a:rPr lang="zh-TW" altLang="en-US"/>
               <a:t>第三層</a:t>
             </a:r>
           </a:p>
           <a:p>
             <a:pPr lvl="3"/>
             <a:r>
-              <a:rPr lang="zh-TW" altLang="en-US" smtClean="0"/>
+              <a:rPr lang="zh-TW" altLang="en-US"/>
               <a:t>第四層</a:t>
             </a:r>
           </a:p>
           <a:p>
             <a:pPr lvl="4"/>
             <a:r>
-              <a:rPr lang="zh-TW" altLang="en-US" smtClean="0"/>
+              <a:rPr lang="zh-TW" altLang="en-US"/>
               <a:t>第五層</a:t>
             </a:r>
-            <a:endParaRPr lang="zh-TW" altLang="en-US"/>
           </a:p>
         </p:txBody>
       </p:sp>
@@ -825,7 +817,7 @@
           <a:p>
             <a:fld id="{36FCB419-7C73-4AB4-9860-2D9772FC8235}" type="datetimeFigureOut">
               <a:rPr lang="zh-TW" altLang="en-US" smtClean="0"/>
-              <a:t>2021/5/8</a:t>
+              <a:t>2025/9/12</a:t>
             </a:fld>
             <a:endParaRPr lang="zh-TW" altLang="en-US"/>
           </a:p>
@@ -923,10 +915,9 @@
           </a:lstStyle>
           <a:p>
             <a:r>
-              <a:rPr lang="zh-TW" altLang="en-US" smtClean="0"/>
+              <a:rPr lang="zh-TW" altLang="en-US"/>
               <a:t>按一下以編輯母片標題樣式</a:t>
             </a:r>
-            <a:endParaRPr lang="zh-TW" altLang="en-US"/>
           </a:p>
         </p:txBody>
       </p:sp>
@@ -1043,7 +1034,7 @@
           <a:p>
             <a:pPr lvl="0"/>
             <a:r>
-              <a:rPr lang="zh-TW" altLang="en-US" smtClean="0"/>
+              <a:rPr lang="zh-TW" altLang="en-US"/>
               <a:t>按一下以編輯母片文字樣式</a:t>
             </a:r>
           </a:p>
@@ -1066,7 +1057,7 @@
           <a:p>
             <a:fld id="{36FCB419-7C73-4AB4-9860-2D9772FC8235}" type="datetimeFigureOut">
               <a:rPr lang="zh-TW" altLang="en-US" smtClean="0"/>
-              <a:t>2021/5/8</a:t>
+              <a:t>2025/9/12</a:t>
             </a:fld>
             <a:endParaRPr lang="zh-TW" altLang="en-US"/>
           </a:p>
@@ -1155,10 +1146,9 @@
           <a:lstStyle/>
           <a:p>
             <a:r>
-              <a:rPr lang="zh-TW" altLang="en-US" smtClean="0"/>
+              <a:rPr lang="zh-TW" altLang="en-US"/>
               <a:t>按一下以編輯母片標題樣式</a:t>
             </a:r>
-            <a:endParaRPr lang="zh-TW" altLang="en-US"/>
           </a:p>
         </p:txBody>
       </p:sp>
@@ -1212,38 +1202,37 @@
           <a:p>
             <a:pPr lvl="0"/>
             <a:r>
-              <a:rPr lang="zh-TW" altLang="en-US" smtClean="0"/>
+              <a:rPr lang="zh-TW" altLang="en-US"/>
               <a:t>按一下以編輯母片文字樣式</a:t>
             </a:r>
           </a:p>
           <a:p>
             <a:pPr lvl="1"/>
             <a:r>
-              <a:rPr lang="zh-TW" altLang="en-US" smtClean="0"/>
+              <a:rPr lang="zh-TW" altLang="en-US"/>
               <a:t>第二層</a:t>
             </a:r>
           </a:p>
           <a:p>
             <a:pPr lvl="2"/>
             <a:r>
-              <a:rPr lang="zh-TW" altLang="en-US" smtClean="0"/>
+              <a:rPr lang="zh-TW" altLang="en-US"/>
               <a:t>第三層</a:t>
             </a:r>
           </a:p>
           <a:p>
             <a:pPr lvl="3"/>
             <a:r>
-              <a:rPr lang="zh-TW" altLang="en-US" smtClean="0"/>
+              <a:rPr lang="zh-TW" altLang="en-US"/>
               <a:t>第四層</a:t>
             </a:r>
           </a:p>
           <a:p>
             <a:pPr lvl="4"/>
             <a:r>
-              <a:rPr lang="zh-TW" altLang="en-US" smtClean="0"/>
+              <a:rPr lang="zh-TW" altLang="en-US"/>
               <a:t>第五層</a:t>
             </a:r>
-            <a:endParaRPr lang="zh-TW" altLang="en-US"/>
           </a:p>
         </p:txBody>
       </p:sp>
@@ -1297,38 +1286,37 @@
           <a:p>
             <a:pPr lvl="0"/>
             <a:r>
-              <a:rPr lang="zh-TW" altLang="en-US" smtClean="0"/>
+              <a:rPr lang="zh-TW" altLang="en-US"/>
               <a:t>按一下以編輯母片文字樣式</a:t>
             </a:r>
           </a:p>
           <a:p>
             <a:pPr lvl="1"/>
             <a:r>
-              <a:rPr lang="zh-TW" altLang="en-US" smtClean="0"/>
+              <a:rPr lang="zh-TW" altLang="en-US"/>
               <a:t>第二層</a:t>
             </a:r>
           </a:p>
           <a:p>
             <a:pPr lvl="2"/>
             <a:r>
-              <a:rPr lang="zh-TW" altLang="en-US" smtClean="0"/>
+              <a:rPr lang="zh-TW" altLang="en-US"/>
               <a:t>第三層</a:t>
             </a:r>
           </a:p>
           <a:p>
             <a:pPr lvl="3"/>
             <a:r>
-              <a:rPr lang="zh-TW" altLang="en-US" smtClean="0"/>
+              <a:rPr lang="zh-TW" altLang="en-US"/>
               <a:t>第四層</a:t>
             </a:r>
           </a:p>
           <a:p>
             <a:pPr lvl="4"/>
             <a:r>
-              <a:rPr lang="zh-TW" altLang="en-US" smtClean="0"/>
+              <a:rPr lang="zh-TW" altLang="en-US"/>
               <a:t>第五層</a:t>
             </a:r>
-            <a:endParaRPr lang="zh-TW" altLang="en-US"/>
           </a:p>
         </p:txBody>
       </p:sp>
@@ -1349,7 +1337,7 @@
           <a:p>
             <a:fld id="{36FCB419-7C73-4AB4-9860-2D9772FC8235}" type="datetimeFigureOut">
               <a:rPr lang="zh-TW" altLang="en-US" smtClean="0"/>
-              <a:t>2021/5/8</a:t>
+              <a:t>2025/9/12</a:t>
             </a:fld>
             <a:endParaRPr lang="zh-TW" altLang="en-US"/>
           </a:p>
@@ -1442,10 +1430,9 @@
           </a:lstStyle>
           <a:p>
             <a:r>
-              <a:rPr lang="zh-TW" altLang="en-US" smtClean="0"/>
+              <a:rPr lang="zh-TW" altLang="en-US"/>
               <a:t>按一下以編輯母片標題樣式</a:t>
             </a:r>
-            <a:endParaRPr lang="zh-TW" altLang="en-US"/>
           </a:p>
         </p:txBody>
       </p:sp>
@@ -1508,7 +1495,7 @@
           <a:p>
             <a:pPr lvl="0"/>
             <a:r>
-              <a:rPr lang="zh-TW" altLang="en-US" smtClean="0"/>
+              <a:rPr lang="zh-TW" altLang="en-US"/>
               <a:t>按一下以編輯母片文字樣式</a:t>
             </a:r>
           </a:p>
@@ -1564,38 +1551,37 @@
           <a:p>
             <a:pPr lvl="0"/>
             <a:r>
-              <a:rPr lang="zh-TW" altLang="en-US" smtClean="0"/>
+              <a:rPr lang="zh-TW" altLang="en-US"/>
               <a:t>按一下以編輯母片文字樣式</a:t>
             </a:r>
           </a:p>
           <a:p>
             <a:pPr lvl="1"/>
             <a:r>
-              <a:rPr lang="zh-TW" altLang="en-US" smtClean="0"/>
+              <a:rPr lang="zh-TW" altLang="en-US"/>
               <a:t>第二層</a:t>
             </a:r>
           </a:p>
           <a:p>
             <a:pPr lvl="2"/>
             <a:r>
-              <a:rPr lang="zh-TW" altLang="en-US" smtClean="0"/>
+              <a:rPr lang="zh-TW" altLang="en-US"/>
               <a:t>第三層</a:t>
             </a:r>
           </a:p>
           <a:p>
             <a:pPr lvl="3"/>
             <a:r>
-              <a:rPr lang="zh-TW" altLang="en-US" smtClean="0"/>
+              <a:rPr lang="zh-TW" altLang="en-US"/>
               <a:t>第四層</a:t>
             </a:r>
           </a:p>
           <a:p>
             <a:pPr lvl="4"/>
             <a:r>
-              <a:rPr lang="zh-TW" altLang="en-US" smtClean="0"/>
+              <a:rPr lang="zh-TW" altLang="en-US"/>
               <a:t>第五層</a:t>
             </a:r>
-            <a:endParaRPr lang="zh-TW" altLang="en-US"/>
           </a:p>
         </p:txBody>
       </p:sp>
@@ -1658,7 +1644,7 @@
           <a:p>
             <a:pPr lvl="0"/>
             <a:r>
-              <a:rPr lang="zh-TW" altLang="en-US" smtClean="0"/>
+              <a:rPr lang="zh-TW" altLang="en-US"/>
               <a:t>按一下以編輯母片文字樣式</a:t>
             </a:r>
           </a:p>
@@ -1714,38 +1700,37 @@
           <a:p>
             <a:pPr lvl="0"/>
             <a:r>
-              <a:rPr lang="zh-TW" altLang="en-US" smtClean="0"/>
+              <a:rPr lang="zh-TW" altLang="en-US"/>
               <a:t>按一下以編輯母片文字樣式</a:t>
             </a:r>
           </a:p>
           <a:p>
             <a:pPr lvl="1"/>
             <a:r>
-              <a:rPr lang="zh-TW" altLang="en-US" smtClean="0"/>
+              <a:rPr lang="zh-TW" altLang="en-US"/>
               <a:t>第二層</a:t>
             </a:r>
           </a:p>
           <a:p>
             <a:pPr lvl="2"/>
             <a:r>
-              <a:rPr lang="zh-TW" altLang="en-US" smtClean="0"/>
+              <a:rPr lang="zh-TW" altLang="en-US"/>
               <a:t>第三層</a:t>
             </a:r>
           </a:p>
           <a:p>
             <a:pPr lvl="3"/>
             <a:r>
-              <a:rPr lang="zh-TW" altLang="en-US" smtClean="0"/>
+              <a:rPr lang="zh-TW" altLang="en-US"/>
               <a:t>第四層</a:t>
             </a:r>
           </a:p>
           <a:p>
             <a:pPr lvl="4"/>
             <a:r>
-              <a:rPr lang="zh-TW" altLang="en-US" smtClean="0"/>
+              <a:rPr lang="zh-TW" altLang="en-US"/>
               <a:t>第五層</a:t>
             </a:r>
-            <a:endParaRPr lang="zh-TW" altLang="en-US"/>
           </a:p>
         </p:txBody>
       </p:sp>
@@ -1766,7 +1751,7 @@
           <a:p>
             <a:fld id="{36FCB419-7C73-4AB4-9860-2D9772FC8235}" type="datetimeFigureOut">
               <a:rPr lang="zh-TW" altLang="en-US" smtClean="0"/>
-              <a:t>2021/5/8</a:t>
+              <a:t>2025/9/12</a:t>
             </a:fld>
             <a:endParaRPr lang="zh-TW" altLang="en-US"/>
           </a:p>
@@ -1855,10 +1840,9 @@
           <a:lstStyle/>
           <a:p>
             <a:r>
-              <a:rPr lang="zh-TW" altLang="en-US" smtClean="0"/>
+              <a:rPr lang="zh-TW" altLang="en-US"/>
               <a:t>按一下以編輯母片標題樣式</a:t>
             </a:r>
-            <a:endParaRPr lang="zh-TW" altLang="en-US"/>
           </a:p>
         </p:txBody>
       </p:sp>
@@ -1879,7 +1863,7 @@
           <a:p>
             <a:fld id="{36FCB419-7C73-4AB4-9860-2D9772FC8235}" type="datetimeFigureOut">
               <a:rPr lang="zh-TW" altLang="en-US" smtClean="0"/>
-              <a:t>2021/5/8</a:t>
+              <a:t>2025/9/12</a:t>
             </a:fld>
             <a:endParaRPr lang="zh-TW" altLang="en-US"/>
           </a:p>
@@ -1969,7 +1953,7 @@
           <a:p>
             <a:fld id="{36FCB419-7C73-4AB4-9860-2D9772FC8235}" type="datetimeFigureOut">
               <a:rPr lang="zh-TW" altLang="en-US" smtClean="0"/>
-              <a:t>2021/5/8</a:t>
+              <a:t>2025/9/12</a:t>
             </a:fld>
             <a:endParaRPr lang="zh-TW" altLang="en-US"/>
           </a:p>
@@ -2067,10 +2051,9 @@
           </a:lstStyle>
           <a:p>
             <a:r>
-              <a:rPr lang="zh-TW" altLang="en-US" smtClean="0"/>
+              <a:rPr lang="zh-TW" altLang="en-US"/>
               <a:t>按一下以編輯母片標題樣式</a:t>
             </a:r>
-            <a:endParaRPr lang="zh-TW" altLang="en-US"/>
           </a:p>
         </p:txBody>
       </p:sp>
@@ -2124,38 +2107,37 @@
           <a:p>
             <a:pPr lvl="0"/>
             <a:r>
-              <a:rPr lang="zh-TW" altLang="en-US" smtClean="0"/>
+              <a:rPr lang="zh-TW" altLang="en-US"/>
               <a:t>按一下以編輯母片文字樣式</a:t>
             </a:r>
           </a:p>
           <a:p>
             <a:pPr lvl="1"/>
             <a:r>
-              <a:rPr lang="zh-TW" altLang="en-US" smtClean="0"/>
+              <a:rPr lang="zh-TW" altLang="en-US"/>
               <a:t>第二層</a:t>
             </a:r>
           </a:p>
           <a:p>
             <a:pPr lvl="2"/>
             <a:r>
-              <a:rPr lang="zh-TW" altLang="en-US" smtClean="0"/>
+              <a:rPr lang="zh-TW" altLang="en-US"/>
               <a:t>第三層</a:t>
             </a:r>
           </a:p>
           <a:p>
             <a:pPr lvl="3"/>
             <a:r>
-              <a:rPr lang="zh-TW" altLang="en-US" smtClean="0"/>
+              <a:rPr lang="zh-TW" altLang="en-US"/>
               <a:t>第四層</a:t>
             </a:r>
           </a:p>
           <a:p>
             <a:pPr lvl="4"/>
             <a:r>
-              <a:rPr lang="zh-TW" altLang="en-US" smtClean="0"/>
+              <a:rPr lang="zh-TW" altLang="en-US"/>
               <a:t>第五層</a:t>
             </a:r>
-            <a:endParaRPr lang="zh-TW" altLang="en-US"/>
           </a:p>
         </p:txBody>
       </p:sp>
@@ -2218,7 +2200,7 @@
           <a:p>
             <a:pPr lvl="0"/>
             <a:r>
-              <a:rPr lang="zh-TW" altLang="en-US" smtClean="0"/>
+              <a:rPr lang="zh-TW" altLang="en-US"/>
               <a:t>按一下以編輯母片文字樣式</a:t>
             </a:r>
           </a:p>
@@ -2241,7 +2223,7 @@
           <a:p>
             <a:fld id="{36FCB419-7C73-4AB4-9860-2D9772FC8235}" type="datetimeFigureOut">
               <a:rPr lang="zh-TW" altLang="en-US" smtClean="0"/>
-              <a:t>2021/5/8</a:t>
+              <a:t>2025/9/12</a:t>
             </a:fld>
             <a:endParaRPr lang="zh-TW" altLang="en-US"/>
           </a:p>
@@ -2339,10 +2321,9 @@
           </a:lstStyle>
           <a:p>
             <a:r>
-              <a:rPr lang="zh-TW" altLang="en-US" smtClean="0"/>
+              <a:rPr lang="zh-TW" altLang="en-US"/>
               <a:t>按一下以編輯母片標題樣式</a:t>
             </a:r>
-            <a:endParaRPr lang="zh-TW" altLang="en-US"/>
           </a:p>
         </p:txBody>
       </p:sp>
@@ -2404,10 +2385,9 @@
           </a:lstStyle>
           <a:p>
             <a:r>
-              <a:rPr lang="zh-TW" altLang="en-US" smtClean="0"/>
+              <a:rPr lang="zh-TW" altLang="en-US"/>
               <a:t>按一下圖示以新增圖片</a:t>
             </a:r>
-            <a:endParaRPr lang="zh-TW" altLang="en-US"/>
           </a:p>
         </p:txBody>
       </p:sp>
@@ -2470,7 +2450,7 @@
           <a:p>
             <a:pPr lvl="0"/>
             <a:r>
-              <a:rPr lang="zh-TW" altLang="en-US" smtClean="0"/>
+              <a:rPr lang="zh-TW" altLang="en-US"/>
               <a:t>按一下以編輯母片文字樣式</a:t>
             </a:r>
           </a:p>
@@ -2493,7 +2473,7 @@
           <a:p>
             <a:fld id="{36FCB419-7C73-4AB4-9860-2D9772FC8235}" type="datetimeFigureOut">
               <a:rPr lang="zh-TW" altLang="en-US" smtClean="0"/>
-              <a:t>2021/5/8</a:t>
+              <a:t>2025/9/12</a:t>
             </a:fld>
             <a:endParaRPr lang="zh-TW" altLang="en-US"/>
           </a:p>
@@ -2602,10 +2582,9 @@
           <a:lstStyle/>
           <a:p>
             <a:r>
-              <a:rPr lang="zh-TW" altLang="en-US" smtClean="0"/>
+              <a:rPr lang="zh-TW" altLang="en-US"/>
               <a:t>按一下以編輯母片標題樣式</a:t>
             </a:r>
-            <a:endParaRPr lang="zh-TW" altLang="en-US"/>
           </a:p>
         </p:txBody>
       </p:sp>
@@ -2636,38 +2615,37 @@
           <a:p>
             <a:pPr lvl="0"/>
             <a:r>
-              <a:rPr lang="zh-TW" altLang="en-US" smtClean="0"/>
+              <a:rPr lang="zh-TW" altLang="en-US"/>
               <a:t>按一下以編輯母片文字樣式</a:t>
             </a:r>
           </a:p>
           <a:p>
             <a:pPr lvl="1"/>
             <a:r>
-              <a:rPr lang="zh-TW" altLang="en-US" smtClean="0"/>
+              <a:rPr lang="zh-TW" altLang="en-US"/>
               <a:t>第二層</a:t>
             </a:r>
           </a:p>
           <a:p>
             <a:pPr lvl="2"/>
             <a:r>
-              <a:rPr lang="zh-TW" altLang="en-US" smtClean="0"/>
+              <a:rPr lang="zh-TW" altLang="en-US"/>
               <a:t>第三層</a:t>
             </a:r>
           </a:p>
           <a:p>
             <a:pPr lvl="3"/>
             <a:r>
-              <a:rPr lang="zh-TW" altLang="en-US" smtClean="0"/>
+              <a:rPr lang="zh-TW" altLang="en-US"/>
               <a:t>第四層</a:t>
             </a:r>
           </a:p>
           <a:p>
             <a:pPr lvl="4"/>
             <a:r>
-              <a:rPr lang="zh-TW" altLang="en-US" smtClean="0"/>
+              <a:rPr lang="zh-TW" altLang="en-US"/>
               <a:t>第五層</a:t>
             </a:r>
-            <a:endParaRPr lang="zh-TW" altLang="en-US"/>
           </a:p>
         </p:txBody>
       </p:sp>
@@ -2706,7 +2684,7 @@
           <a:p>
             <a:fld id="{36FCB419-7C73-4AB4-9860-2D9772FC8235}" type="datetimeFigureOut">
               <a:rPr lang="zh-TW" altLang="en-US" smtClean="0"/>
-              <a:t>2021/5/8</a:t>
+              <a:t>2025/9/12</a:t>
             </a:fld>
             <a:endParaRPr lang="zh-TW" altLang="en-US"/>
           </a:p>
@@ -3132,23 +3110,6 @@
               </a:rPr>
               <a:t>264</a:t>
             </a:r>
-            <a:r>
-              <a:rPr lang="en-US" altLang="zh-CN" sz="7200" b="1" i="1" dirty="0">
-                <a:solidFill>
-                  <a:srgbClr val="660033"/>
-                </a:solidFill>
-                <a:effectLst>
-                  <a:outerShdw blurRad="38100" dist="38100" dir="2700000" algn="tl">
-                    <a:srgbClr val="000000">
-                      <a:alpha val="43137"/>
-                    </a:srgbClr>
-                  </a:outerShdw>
-                </a:effectLst>
-                <a:latin typeface="微軟正黑體" pitchFamily="34" charset="-120"/>
-                <a:ea typeface="微軟正黑體" pitchFamily="34" charset="-120"/>
-              </a:rPr>
-              <a:t/>
-            </a:r>
             <a:br>
               <a:rPr lang="en-US" altLang="zh-CN" sz="7200" b="1" i="1" dirty="0">
                 <a:solidFill>
@@ -3180,24 +3141,7 @@
                 <a:latin typeface="微軟正黑體" pitchFamily="34" charset="-120"/>
                 <a:ea typeface="微軟正黑體" pitchFamily="34" charset="-120"/>
               </a:rPr>
-              <a:t>基</a:t>
-            </a:r>
-            <a:r>
-              <a:rPr lang="zh-CN" altLang="en-US" sz="8000" b="1" dirty="0">
-                <a:solidFill>
-                  <a:srgbClr val="660033"/>
-                </a:solidFill>
-                <a:effectLst>
-                  <a:outerShdw blurRad="38100" dist="38100" dir="2700000" algn="tl">
-                    <a:srgbClr val="000000">
-                      <a:alpha val="43137"/>
-                    </a:srgbClr>
-                  </a:outerShdw>
-                </a:effectLst>
-                <a:latin typeface="微軟正黑體" pitchFamily="34" charset="-120"/>
-                <a:ea typeface="微軟正黑體" pitchFamily="34" charset="-120"/>
-              </a:rPr>
-              <a:t>督化家庭</a:t>
+              <a:t>基督化家庭</a:t>
             </a:r>
             <a:endParaRPr lang="zh-TW" altLang="en-US" sz="8000" b="1" dirty="0">
               <a:solidFill>
@@ -3226,13 +3170,6 @@
   <p:clrMapOvr>
     <a:masterClrMapping/>
   </p:clrMapOvr>
-  <p:timing>
-    <p:tnLst>
-      <p:par>
-        <p:cTn id="1" dur="indefinite" restart="never" nodeType="tmRoot"/>
-      </p:par>
-    </p:tnLst>
-  </p:timing>
 </p:sld>
 </file>
 
@@ -3349,7 +3286,7 @@
                   <a:srgbClr val="660033"/>
                 </a:solidFill>
               </a:rPr>
-              <a:t>( 3 )</a:t>
+              <a:t>( 3 / 4 )</a:t>
             </a:r>
             <a:endParaRPr lang="vi-VN" sz="4800" b="1" dirty="0">
               <a:solidFill>
@@ -3369,13 +3306,6 @@
   <p:clrMapOvr>
     <a:masterClrMapping/>
   </p:clrMapOvr>
-  <p:timing>
-    <p:tnLst>
-      <p:par>
-        <p:cTn id="1" dur="indefinite" restart="never" nodeType="tmRoot"/>
-      </p:par>
-    </p:tnLst>
-  </p:timing>
 </p:sld>
 </file>
 
@@ -3492,7 +3422,7 @@
                   <a:srgbClr val="660033"/>
                 </a:solidFill>
               </a:rPr>
-              <a:t>( 3 )</a:t>
+              <a:t>( 3 / 4 )</a:t>
             </a:r>
             <a:endParaRPr lang="vi-VN" sz="4800" b="1" dirty="0">
               <a:solidFill>
@@ -3512,13 +3442,6 @@
   <p:clrMapOvr>
     <a:masterClrMapping/>
   </p:clrMapOvr>
-  <p:timing>
-    <p:tnLst>
-      <p:par>
-        <p:cTn id="1" dur="indefinite" restart="never" nodeType="tmRoot"/>
-      </p:par>
-    </p:tnLst>
-  </p:timing>
 </p:sld>
 </file>
 
@@ -3635,7 +3558,7 @@
                   <a:srgbClr val="660033"/>
                 </a:solidFill>
               </a:rPr>
-              <a:t>( 3 )</a:t>
+              <a:t>( 3 / 4 )</a:t>
             </a:r>
             <a:endParaRPr lang="vi-VN" sz="4800" b="1" dirty="0">
               <a:solidFill>
@@ -3655,13 +3578,6 @@
   <p:clrMapOvr>
     <a:masterClrMapping/>
   </p:clrMapOvr>
-  <p:timing>
-    <p:tnLst>
-      <p:par>
-        <p:cTn id="1" dur="indefinite" restart="never" nodeType="tmRoot"/>
-      </p:par>
-    </p:tnLst>
-  </p:timing>
 </p:sld>
 </file>
 
@@ -3778,7 +3694,7 @@
                   <a:srgbClr val="660033"/>
                 </a:solidFill>
               </a:rPr>
-              <a:t>( 3 )</a:t>
+              <a:t>( 3 / 4 )</a:t>
             </a:r>
             <a:endParaRPr lang="vi-VN" sz="4800" b="1" dirty="0">
               <a:solidFill>
@@ -3798,13 +3714,6 @@
   <p:clrMapOvr>
     <a:masterClrMapping/>
   </p:clrMapOvr>
-  <p:timing>
-    <p:tnLst>
-      <p:par>
-        <p:cTn id="1" dur="indefinite" restart="never" nodeType="tmRoot"/>
-      </p:par>
-    </p:tnLst>
-  </p:timing>
 </p:sld>
 </file>
 
@@ -3921,7 +3830,7 @@
                   <a:srgbClr val="660033"/>
                 </a:solidFill>
               </a:rPr>
-              <a:t>( 4 )</a:t>
+              <a:t>( 4 / 4 )</a:t>
             </a:r>
             <a:endParaRPr lang="vi-VN" sz="4800" b="1" dirty="0">
               <a:solidFill>
@@ -3941,13 +3850,6 @@
   <p:clrMapOvr>
     <a:masterClrMapping/>
   </p:clrMapOvr>
-  <p:timing>
-    <p:tnLst>
-      <p:par>
-        <p:cTn id="1" dur="indefinite" restart="never" nodeType="tmRoot"/>
-      </p:par>
-    </p:tnLst>
-  </p:timing>
 </p:sld>
 </file>
 
@@ -4064,7 +3966,7 @@
                   <a:srgbClr val="660033"/>
                 </a:solidFill>
               </a:rPr>
-              <a:t>( 4 )</a:t>
+              <a:t>( 4 / 4 )</a:t>
             </a:r>
             <a:endParaRPr lang="vi-VN" sz="4800" b="1" dirty="0">
               <a:solidFill>
@@ -4084,13 +3986,6 @@
   <p:clrMapOvr>
     <a:masterClrMapping/>
   </p:clrMapOvr>
-  <p:timing>
-    <p:tnLst>
-      <p:par>
-        <p:cTn id="1" dur="indefinite" restart="never" nodeType="tmRoot"/>
-      </p:par>
-    </p:tnLst>
-  </p:timing>
 </p:sld>
 </file>
 
@@ -4207,7 +4102,7 @@
                   <a:srgbClr val="660033"/>
                 </a:solidFill>
               </a:rPr>
-              <a:t>( 4 )</a:t>
+              <a:t>( 4 / 4 )</a:t>
             </a:r>
             <a:endParaRPr lang="vi-VN" sz="4800" b="1" dirty="0">
               <a:solidFill>
@@ -4227,13 +4122,6 @@
   <p:clrMapOvr>
     <a:masterClrMapping/>
   </p:clrMapOvr>
-  <p:timing>
-    <p:tnLst>
-      <p:par>
-        <p:cTn id="1" dur="indefinite" restart="never" nodeType="tmRoot"/>
-      </p:par>
-    </p:tnLst>
-  </p:timing>
 </p:sld>
 </file>
 
@@ -4350,7 +4238,7 @@
                   <a:srgbClr val="660033"/>
                 </a:solidFill>
               </a:rPr>
-              <a:t>( 4 )</a:t>
+              <a:t>( 4 / 4 )</a:t>
             </a:r>
             <a:endParaRPr lang="vi-VN" sz="4800" b="1" dirty="0">
               <a:solidFill>
@@ -4370,13 +4258,6 @@
   <p:clrMapOvr>
     <a:masterClrMapping/>
   </p:clrMapOvr>
-  <p:timing>
-    <p:tnLst>
-      <p:par>
-        <p:cTn id="1" dur="indefinite" restart="never" nodeType="tmRoot"/>
-      </p:par>
-    </p:tnLst>
-  </p:timing>
 </p:sld>
 </file>
 
@@ -4493,7 +4374,7 @@
                   <a:srgbClr val="660033"/>
                 </a:solidFill>
               </a:rPr>
-              <a:t>( 1 )</a:t>
+              <a:t>( 1 / 4 )</a:t>
             </a:r>
             <a:endParaRPr lang="vi-VN" sz="4800" b="1" dirty="0">
               <a:solidFill>
@@ -4513,13 +4394,6 @@
   <p:clrMapOvr>
     <a:masterClrMapping/>
   </p:clrMapOvr>
-  <p:timing>
-    <p:tnLst>
-      <p:par>
-        <p:cTn id="1" dur="indefinite" restart="never" nodeType="tmRoot"/>
-      </p:par>
-    </p:tnLst>
-  </p:timing>
 </p:sld>
 </file>
 
@@ -4636,7 +4510,7 @@
                   <a:srgbClr val="660033"/>
                 </a:solidFill>
               </a:rPr>
-              <a:t>( 1 )</a:t>
+              <a:t>( 1 / 4 )</a:t>
             </a:r>
             <a:endParaRPr lang="vi-VN" sz="4800" b="1" dirty="0">
               <a:solidFill>
@@ -4656,13 +4530,6 @@
   <p:clrMapOvr>
     <a:masterClrMapping/>
   </p:clrMapOvr>
-  <p:timing>
-    <p:tnLst>
-      <p:par>
-        <p:cTn id="1" dur="indefinite" restart="never" nodeType="tmRoot"/>
-      </p:par>
-    </p:tnLst>
-  </p:timing>
 </p:sld>
 </file>
 
@@ -4779,7 +4646,7 @@
                   <a:srgbClr val="660033"/>
                 </a:solidFill>
               </a:rPr>
-              <a:t>( 1 )</a:t>
+              <a:t>( 1 / 4 )</a:t>
             </a:r>
             <a:endParaRPr lang="vi-VN" sz="4800" b="1" dirty="0">
               <a:solidFill>
@@ -4799,13 +4666,6 @@
   <p:clrMapOvr>
     <a:masterClrMapping/>
   </p:clrMapOvr>
-  <p:timing>
-    <p:tnLst>
-      <p:par>
-        <p:cTn id="1" dur="indefinite" restart="never" nodeType="tmRoot"/>
-      </p:par>
-    </p:tnLst>
-  </p:timing>
 </p:sld>
 </file>
 
@@ -4922,7 +4782,7 @@
                   <a:srgbClr val="660033"/>
                 </a:solidFill>
               </a:rPr>
-              <a:t>( 1 )</a:t>
+              <a:t>( 1 / 4 )</a:t>
             </a:r>
             <a:endParaRPr lang="vi-VN" sz="4800" b="1" dirty="0">
               <a:solidFill>
@@ -4942,13 +4802,6 @@
   <p:clrMapOvr>
     <a:masterClrMapping/>
   </p:clrMapOvr>
-  <p:timing>
-    <p:tnLst>
-      <p:par>
-        <p:cTn id="1" dur="indefinite" restart="never" nodeType="tmRoot"/>
-      </p:par>
-    </p:tnLst>
-  </p:timing>
 </p:sld>
 </file>
 
@@ -5065,7 +4918,7 @@
                   <a:srgbClr val="660033"/>
                 </a:solidFill>
               </a:rPr>
-              <a:t>( 2 )</a:t>
+              <a:t>( 2 / 4 )</a:t>
             </a:r>
             <a:endParaRPr lang="vi-VN" sz="4800" b="1" dirty="0">
               <a:solidFill>
@@ -5085,13 +4938,6 @@
   <p:clrMapOvr>
     <a:masterClrMapping/>
   </p:clrMapOvr>
-  <p:timing>
-    <p:tnLst>
-      <p:par>
-        <p:cTn id="1" dur="indefinite" restart="never" nodeType="tmRoot"/>
-      </p:par>
-    </p:tnLst>
-  </p:timing>
 </p:sld>
 </file>
 
@@ -5208,7 +5054,7 @@
                   <a:srgbClr val="660033"/>
                 </a:solidFill>
               </a:rPr>
-              <a:t>( 2 )</a:t>
+              <a:t>( 2 / 4 )</a:t>
             </a:r>
             <a:endParaRPr lang="vi-VN" sz="4800" b="1" dirty="0">
               <a:solidFill>
@@ -5228,13 +5074,6 @@
   <p:clrMapOvr>
     <a:masterClrMapping/>
   </p:clrMapOvr>
-  <p:timing>
-    <p:tnLst>
-      <p:par>
-        <p:cTn id="1" dur="indefinite" restart="never" nodeType="tmRoot"/>
-      </p:par>
-    </p:tnLst>
-  </p:timing>
 </p:sld>
 </file>
 
@@ -5351,7 +5190,7 @@
                   <a:srgbClr val="660033"/>
                 </a:solidFill>
               </a:rPr>
-              <a:t>( 2 )</a:t>
+              <a:t>( 2 / 4 )</a:t>
             </a:r>
             <a:endParaRPr lang="vi-VN" sz="4800" b="1" dirty="0">
               <a:solidFill>
@@ -5371,13 +5210,6 @@
   <p:clrMapOvr>
     <a:masterClrMapping/>
   </p:clrMapOvr>
-  <p:timing>
-    <p:tnLst>
-      <p:par>
-        <p:cTn id="1" dur="indefinite" restart="never" nodeType="tmRoot"/>
-      </p:par>
-    </p:tnLst>
-  </p:timing>
 </p:sld>
 </file>
 
@@ -5494,7 +5326,7 @@
                   <a:srgbClr val="660033"/>
                 </a:solidFill>
               </a:rPr>
-              <a:t>( 2 )</a:t>
+              <a:t>( 2 / 4 )</a:t>
             </a:r>
             <a:endParaRPr lang="vi-VN" sz="4800" b="1" dirty="0">
               <a:solidFill>
@@ -5514,13 +5346,6 @@
   <p:clrMapOvr>
     <a:masterClrMapping/>
   </p:clrMapOvr>
-  <p:timing>
-    <p:tnLst>
-      <p:par>
-        <p:cTn id="1" dur="indefinite" restart="never" nodeType="tmRoot"/>
-      </p:par>
-    </p:tnLst>
-  </p:timing>
 </p:sld>
 </file>
 
